--- a/pr1 (2).pptx
+++ b/pr1 (2).pptx
@@ -5,7 +5,7 @@
     <p:sldMasterId id="2147483648" r:id="rId1"/>
   </p:sldMasterIdLst>
   <p:notesMasterIdLst>
-    <p:notesMasterId r:id="rId16"/>
+    <p:notesMasterId r:id="rId15"/>
   </p:notesMasterIdLst>
   <p:sldIdLst>
     <p:sldId id="256" r:id="rId2"/>
@@ -19,23 +19,22 @@
     <p:sldId id="264" r:id="rId10"/>
     <p:sldId id="267" r:id="rId11"/>
     <p:sldId id="268" r:id="rId12"/>
-    <p:sldId id="269" r:id="rId13"/>
-    <p:sldId id="265" r:id="rId14"/>
-    <p:sldId id="266" r:id="rId15"/>
+    <p:sldId id="265" r:id="rId13"/>
+    <p:sldId id="266" r:id="rId14"/>
   </p:sldIdLst>
   <p:sldSz cx="9144000" cy="5143500" type="screen16x9"/>
   <p:notesSz cx="5143500" cy="9144000"/>
   <p:embeddedFontLst>
     <p:embeddedFont>
-      <p:font typeface="PT Mono" panose="020B0604020202020204" charset="0"/>
-      <p:regular r:id="rId17"/>
+      <p:font typeface="Calibri" panose="020F0502020204030204" pitchFamily="34" charset="0"/>
+      <p:regular r:id="rId16"/>
+      <p:bold r:id="rId17"/>
+      <p:italic r:id="rId18"/>
+      <p:boldItalic r:id="rId19"/>
     </p:embeddedFont>
     <p:embeddedFont>
-      <p:font typeface="Calibri" panose="020F0502020204030204" pitchFamily="34" charset="0"/>
-      <p:regular r:id="rId18"/>
-      <p:bold r:id="rId19"/>
-      <p:italic r:id="rId20"/>
-      <p:boldItalic r:id="rId21"/>
+      <p:font typeface="PT Mono" panose="020B0604020202020204" charset="0"/>
+      <p:regular r:id="rId20"/>
     </p:embeddedFont>
   </p:embeddedFontLst>
   <p:defaultTextStyle>
@@ -272,7 +271,7 @@
       <p15:sldGuideLst xmlns:p15="http://schemas.microsoft.com/office/powerpoint/2012/main"/>
     </p:ext>
     <p:ext uri="GoogleSlidesCustomDataVersion2">
-      <go:slidesCustomData xmlns:go="http://customooxmlschemas.google.com/" xmlns:ahyp="http://schemas.microsoft.com/office/drawing/2018/hyperlinkcolor" xmlns:p15="http://schemas.microsoft.com/office/powerpoint/2012/main" xmlns:p14="http://schemas.microsoft.com/office/powerpoint/2010/main" xmlns:com="http://schemas.openxmlformats.org/drawingml/2006/compatibility" xmlns:pvml="urn:schemas-microsoft-com:office:powerpoint" xmlns:v="urn:schemas-microsoft-com:vml" xmlns:o="urn:schemas-microsoft-com:office:office" xmlns:dgm="http://schemas.openxmlformats.org/drawingml/2006/diagram" xmlns:c="http://schemas.openxmlformats.org/drawingml/2006/chart" xmlns:mv="urn:schemas-microsoft-com:mac:vml" xmlns:mc="http://schemas.openxmlformats.org/markup-compatibility/2006" xmlns="" r:id="rId22" roundtripDataSignature="AMtx7miml5qiCSj3k9PFfL3kPWsBeWI5Yg=="/>
+      <go:slidesCustomData xmlns="" xmlns:mc="http://schemas.openxmlformats.org/markup-compatibility/2006" xmlns:mv="urn:schemas-microsoft-com:mac:vml" xmlns:c="http://schemas.openxmlformats.org/drawingml/2006/chart" xmlns:dgm="http://schemas.openxmlformats.org/drawingml/2006/diagram" xmlns:o="urn:schemas-microsoft-com:office:office" xmlns:v="urn:schemas-microsoft-com:vml" xmlns:pvml="urn:schemas-microsoft-com:office:powerpoint" xmlns:com="http://schemas.openxmlformats.org/drawingml/2006/compatibility" xmlns:p14="http://schemas.microsoft.com/office/powerpoint/2010/main" xmlns:p15="http://schemas.microsoft.com/office/powerpoint/2012/main" xmlns:ahyp="http://schemas.microsoft.com/office/drawing/2018/hyperlinkcolor" xmlns:go="http://customooxmlschemas.google.com/" r:id="rId22" roundtripDataSignature="AMtx7miml5qiCSj3k9PFfL3kPWsBeWI5Yg=="/>
     </p:ext>
   </p:extLst>
 </p:presentation>
@@ -1283,193 +1282,6 @@
   <p:cSld>
     <p:spTree>
       <p:nvGrpSpPr>
-        <p:cNvPr id="1" name="Shape 101"/>
-        <p:cNvGrpSpPr/>
-        <p:nvPr/>
-      </p:nvGrpSpPr>
-      <p:grpSpPr>
-        <a:xfrm>
-          <a:off x="0" y="0"/>
-          <a:ext cx="0" cy="0"/>
-          <a:chOff x="0" y="0"/>
-          <a:chExt cx="0" cy="0"/>
-        </a:xfrm>
-      </p:grpSpPr>
-      <p:sp>
-        <p:nvSpPr>
-          <p:cNvPr id="102" name="Google Shape;102;p9:notes"/>
-          <p:cNvSpPr>
-            <a:spLocks noGrp="1" noRot="1" noChangeAspect="1"/>
-          </p:cNvSpPr>
-          <p:nvPr>
-            <p:ph type="sldImg" idx="2"/>
-          </p:nvPr>
-        </p:nvSpPr>
-        <p:spPr>
-          <a:xfrm>
-            <a:off x="-1166813" y="0"/>
-            <a:ext cx="5334001" cy="3000375"/>
-          </a:xfrm>
-          <a:custGeom>
-            <a:avLst/>
-            <a:gdLst/>
-            <a:ahLst/>
-            <a:cxnLst/>
-            <a:rect l="l" t="t" r="r" b="b"/>
-            <a:pathLst>
-              <a:path w="120000" h="120000" extrusionOk="0">
-                <a:moveTo>
-                  <a:pt x="0" y="0"/>
-                </a:moveTo>
-                <a:lnTo>
-                  <a:pt x="120000" y="0"/>
-                </a:lnTo>
-                <a:lnTo>
-                  <a:pt x="120000" y="120000"/>
-                </a:lnTo>
-                <a:lnTo>
-                  <a:pt x="0" y="120000"/>
-                </a:lnTo>
-                <a:close/>
-              </a:path>
-            </a:pathLst>
-          </a:custGeom>
-          <a:noFill/>
-          <a:ln>
-            <a:noFill/>
-          </a:ln>
-        </p:spPr>
-      </p:sp>
-      <p:sp>
-        <p:nvSpPr>
-          <p:cNvPr id="103" name="Google Shape;103;p9:notes"/>
-          <p:cNvSpPr txBox="1">
-            <a:spLocks noGrp="1"/>
-          </p:cNvSpPr>
-          <p:nvPr>
-            <p:ph type="body" idx="1"/>
-          </p:nvPr>
-        </p:nvSpPr>
-        <p:spPr>
-          <a:xfrm>
-            <a:off x="0" y="0"/>
-            <a:ext cx="3000000" cy="3000000"/>
-          </a:xfrm>
-          <a:prstGeom prst="rect">
-            <a:avLst/>
-          </a:prstGeom>
-          <a:noFill/>
-          <a:ln>
-            <a:noFill/>
-          </a:ln>
-        </p:spPr>
-        <p:txBody>
-          <a:bodyPr spcFirstLastPara="1" wrap="square" lIns="91425" tIns="45700" rIns="91425" bIns="45700" anchor="t" anchorCtr="0">
-            <a:noAutofit/>
-          </a:bodyPr>
-          <a:lstStyle/>
-          <a:p>
-            <a:pPr marL="0" marR="0" lvl="0" indent="0" algn="l" rtl="0">
-              <a:spcBef>
-                <a:spcPts val="0"/>
-              </a:spcBef>
-              <a:spcAft>
-                <a:spcPts val="0"/>
-              </a:spcAft>
-              <a:buNone/>
-            </a:pPr>
-            <a:endParaRPr sz="1200" dirty="0">
-              <a:solidFill>
-                <a:schemeClr val="dk1"/>
-              </a:solidFill>
-              <a:latin typeface="Arial"/>
-              <a:ea typeface="Arial"/>
-              <a:cs typeface="Arial"/>
-              <a:sym typeface="Arial"/>
-            </a:endParaRPr>
-          </a:p>
-        </p:txBody>
-      </p:sp>
-      <p:sp>
-        <p:nvSpPr>
-          <p:cNvPr id="104" name="Google Shape;104;p9:notes"/>
-          <p:cNvSpPr txBox="1">
-            <a:spLocks noGrp="1"/>
-          </p:cNvSpPr>
-          <p:nvPr>
-            <p:ph type="sldNum" idx="12"/>
-          </p:nvPr>
-        </p:nvSpPr>
-        <p:spPr>
-          <a:xfrm>
-            <a:off x="0" y="0"/>
-            <a:ext cx="3000000" cy="3000000"/>
-          </a:xfrm>
-          <a:prstGeom prst="rect">
-            <a:avLst/>
-          </a:prstGeom>
-          <a:noFill/>
-          <a:ln>
-            <a:noFill/>
-          </a:ln>
-        </p:spPr>
-        <p:txBody>
-          <a:bodyPr spcFirstLastPara="1" wrap="square" lIns="91425" tIns="45700" rIns="91425" bIns="45700" anchor="t" anchorCtr="0">
-            <a:noAutofit/>
-          </a:bodyPr>
-          <a:lstStyle/>
-          <a:p>
-            <a:pPr marL="0" marR="0" lvl="0" indent="0" algn="l" rtl="0">
-              <a:spcBef>
-                <a:spcPts val="0"/>
-              </a:spcBef>
-              <a:spcAft>
-                <a:spcPts val="0"/>
-              </a:spcAft>
-              <a:buNone/>
-            </a:pPr>
-            <a:fld id="{00000000-1234-1234-1234-123412341234}" type="slidenum">
-              <a:rPr lang="en-US" sz="1800">
-                <a:solidFill>
-                  <a:schemeClr val="dk1"/>
-                </a:solidFill>
-                <a:latin typeface="Arial"/>
-                <a:ea typeface="Arial"/>
-                <a:cs typeface="Arial"/>
-                <a:sym typeface="Arial"/>
-              </a:rPr>
-              <a:t>12</a:t>
-            </a:fld>
-            <a:endParaRPr sz="1800">
-              <a:solidFill>
-                <a:schemeClr val="dk1"/>
-              </a:solidFill>
-              <a:latin typeface="Arial"/>
-              <a:ea typeface="Arial"/>
-              <a:cs typeface="Arial"/>
-              <a:sym typeface="Arial"/>
-            </a:endParaRPr>
-          </a:p>
-        </p:txBody>
-      </p:sp>
-    </p:spTree>
-    <p:extLst>
-      <p:ext uri="{BB962C8B-B14F-4D97-AF65-F5344CB8AC3E}">
-        <p14:creationId xmlns:p14="http://schemas.microsoft.com/office/powerpoint/2010/main" val="458937743"/>
-      </p:ext>
-    </p:extLst>
-  </p:cSld>
-  <p:clrMapOvr>
-    <a:masterClrMapping/>
-  </p:clrMapOvr>
-</p:notes>
-</file>
-
-<file path=ppt/notesSlides/notesSlide13.xml><?xml version="1.0" encoding="utf-8"?>
-<p:notes xmlns:a="http://schemas.openxmlformats.org/drawingml/2006/main" xmlns:r="http://schemas.openxmlformats.org/officeDocument/2006/relationships" xmlns:p="http://schemas.openxmlformats.org/presentationml/2006/main" showMasterSp="0" showMasterPhAnim="0">
-  <p:cSld>
-    <p:spTree>
-      <p:nvGrpSpPr>
         <p:cNvPr id="1" name="Shape 113"/>
         <p:cNvGrpSpPr/>
         <p:nvPr/>
@@ -1625,7 +1437,7 @@
                 <a:cs typeface="Arial"/>
                 <a:sym typeface="Arial"/>
               </a:rPr>
-              <a:t>13</a:t>
+              <a:t>12</a:t>
             </a:fld>
             <a:endParaRPr sz="1800">
               <a:solidFill>
@@ -1647,7 +1459,7 @@
 </p:notes>
 </file>
 
-<file path=ppt/notesSlides/notesSlide14.xml><?xml version="1.0" encoding="utf-8"?>
+<file path=ppt/notesSlides/notesSlide13.xml><?xml version="1.0" encoding="utf-8"?>
 <p:notes xmlns:a="http://schemas.openxmlformats.org/drawingml/2006/main" xmlns:r="http://schemas.openxmlformats.org/officeDocument/2006/relationships" xmlns:p="http://schemas.openxmlformats.org/presentationml/2006/main" showMasterSp="0" showMasterPhAnim="0">
   <p:cSld>
     <p:spTree>
@@ -1807,7 +1619,7 @@
                 <a:cs typeface="Arial"/>
                 <a:sym typeface="Arial"/>
               </a:rPr>
-              <a:t>14</a:t>
+              <a:t>13</a:t>
             </a:fld>
             <a:endParaRPr sz="1800">
               <a:solidFill>
@@ -5290,422 +5102,6 @@
     </p:bg>
     <p:spTree>
       <p:nvGrpSpPr>
-        <p:cNvPr id="1" name="Shape 105"/>
-        <p:cNvGrpSpPr/>
-        <p:nvPr/>
-      </p:nvGrpSpPr>
-      <p:grpSpPr>
-        <a:xfrm>
-          <a:off x="0" y="0"/>
-          <a:ext cx="0" cy="0"/>
-          <a:chOff x="0" y="0"/>
-          <a:chExt cx="0" cy="0"/>
-        </a:xfrm>
-      </p:grpSpPr>
-      <p:pic>
-        <p:nvPicPr>
-          <p:cNvPr id="14" name="Google Shape;100;p8" descr="A green circle with a black background&#10;&#10;Description automatically generated"/>
-          <p:cNvPicPr preferRelativeResize="0"/>
-          <p:nvPr/>
-        </p:nvPicPr>
-        <p:blipFill rotWithShape="1">
-          <a:blip r:embed="rId3">
-            <a:alphaModFix/>
-          </a:blip>
-          <a:srcRect/>
-          <a:stretch/>
-        </p:blipFill>
-        <p:spPr>
-          <a:xfrm>
-            <a:off x="5581207" y="3709433"/>
-            <a:ext cx="5143500" cy="5143500"/>
-          </a:xfrm>
-          <a:prstGeom prst="rect">
-            <a:avLst/>
-          </a:prstGeom>
-          <a:noFill/>
-          <a:ln>
-            <a:noFill/>
-          </a:ln>
-        </p:spPr>
-      </p:pic>
-      <p:pic>
-        <p:nvPicPr>
-          <p:cNvPr id="107" name="Google Shape;107;p9" descr="preencoded.png"/>
-          <p:cNvPicPr preferRelativeResize="0"/>
-          <p:nvPr/>
-        </p:nvPicPr>
-        <p:blipFill rotWithShape="1">
-          <a:blip r:embed="rId4">
-            <a:alphaModFix/>
-          </a:blip>
-          <a:srcRect/>
-          <a:stretch/>
-        </p:blipFill>
-        <p:spPr>
-          <a:xfrm>
-            <a:off x="0" y="0"/>
-            <a:ext cx="9144000" cy="5143500"/>
-          </a:xfrm>
-          <a:prstGeom prst="rect">
-            <a:avLst/>
-          </a:prstGeom>
-          <a:noFill/>
-          <a:ln>
-            <a:noFill/>
-          </a:ln>
-        </p:spPr>
-      </p:pic>
-      <p:sp>
-        <p:nvSpPr>
-          <p:cNvPr id="106" name="Google Shape;106;p9"/>
-          <p:cNvSpPr/>
-          <p:nvPr/>
-        </p:nvSpPr>
-        <p:spPr>
-          <a:xfrm>
-            <a:off x="0" y="0"/>
-            <a:ext cx="9144000" cy="5143500"/>
-          </a:xfrm>
-          <a:prstGeom prst="rect">
-            <a:avLst/>
-          </a:prstGeom>
-          <a:noFill/>
-          <a:ln>
-            <a:noFill/>
-          </a:ln>
-        </p:spPr>
-        <p:txBody>
-          <a:bodyPr spcFirstLastPara="1" wrap="square" lIns="91425" tIns="45700" rIns="91425" bIns="45700" anchor="t" anchorCtr="0">
-            <a:noAutofit/>
-          </a:bodyPr>
-          <a:lstStyle/>
-          <a:p>
-            <a:pPr marL="0" marR="0" lvl="0" indent="0" algn="l" rtl="0">
-              <a:spcBef>
-                <a:spcPts val="0"/>
-              </a:spcBef>
-              <a:spcAft>
-                <a:spcPts val="0"/>
-              </a:spcAft>
-              <a:buNone/>
-            </a:pPr>
-            <a:endParaRPr sz="1800">
-              <a:solidFill>
-                <a:schemeClr val="dk1"/>
-              </a:solidFill>
-              <a:latin typeface="Calibri"/>
-              <a:ea typeface="Calibri"/>
-              <a:cs typeface="Calibri"/>
-              <a:sym typeface="Calibri"/>
-            </a:endParaRPr>
-          </a:p>
-        </p:txBody>
-      </p:sp>
-      <p:sp>
-        <p:nvSpPr>
-          <p:cNvPr id="110" name="Google Shape;110;p9"/>
-          <p:cNvSpPr/>
-          <p:nvPr/>
-        </p:nvSpPr>
-        <p:spPr>
-          <a:xfrm>
-            <a:off x="588003" y="848625"/>
-            <a:ext cx="7862888" cy="428625"/>
-          </a:xfrm>
-          <a:prstGeom prst="rect">
-            <a:avLst/>
-          </a:prstGeom>
-          <a:noFill/>
-          <a:ln>
-            <a:noFill/>
-          </a:ln>
-        </p:spPr>
-        <p:txBody>
-          <a:bodyPr spcFirstLastPara="1" wrap="square" lIns="91425" tIns="45700" rIns="91425" bIns="45700" anchor="ctr" anchorCtr="0">
-            <a:noAutofit/>
-          </a:bodyPr>
-          <a:lstStyle/>
-          <a:p>
-            <a:pPr algn="ctr">
-              <a:lnSpc>
-                <a:spcPct val="75000"/>
-              </a:lnSpc>
-              <a:buClr>
-                <a:srgbClr val="FFFFFF"/>
-              </a:buClr>
-              <a:buSzPts val="4500"/>
-            </a:pPr>
-            <a:endParaRPr sz="4500" dirty="0">
-              <a:solidFill>
-                <a:schemeClr val="dk1"/>
-              </a:solidFill>
-              <a:latin typeface="PT Mono" panose="020B0604020202020204" charset="0"/>
-              <a:ea typeface="Calibri"/>
-              <a:cs typeface="Calibri"/>
-              <a:sym typeface="Calibri"/>
-            </a:endParaRPr>
-          </a:p>
-        </p:txBody>
-      </p:sp>
-      <p:sp>
-        <p:nvSpPr>
-          <p:cNvPr id="111" name="Google Shape;111;p9"/>
-          <p:cNvSpPr/>
-          <p:nvPr/>
-        </p:nvSpPr>
-        <p:spPr>
-          <a:xfrm>
-            <a:off x="745718" y="1019175"/>
-            <a:ext cx="6633277" cy="1256192"/>
-          </a:xfrm>
-          <a:prstGeom prst="rect">
-            <a:avLst/>
-          </a:prstGeom>
-          <a:noFill/>
-          <a:ln>
-            <a:noFill/>
-          </a:ln>
-        </p:spPr>
-        <p:txBody>
-          <a:bodyPr spcFirstLastPara="1" wrap="square" lIns="91425" tIns="45700" rIns="91425" bIns="45700" anchor="ctr" anchorCtr="0">
-            <a:noAutofit/>
-          </a:bodyPr>
-          <a:lstStyle/>
-          <a:p>
-            <a:pPr lvl="0">
-              <a:lnSpc>
-                <a:spcPct val="140625"/>
-              </a:lnSpc>
-              <a:buClr>
-                <a:srgbClr val="FFFFFF"/>
-              </a:buClr>
-              <a:buSzPts val="2400"/>
-            </a:pPr>
-            <a:endParaRPr sz="2400" dirty="0">
-              <a:solidFill>
-                <a:schemeClr val="dk1"/>
-              </a:solidFill>
-              <a:latin typeface="Calibri"/>
-              <a:ea typeface="Calibri"/>
-              <a:cs typeface="Calibri"/>
-              <a:sym typeface="Calibri"/>
-            </a:endParaRPr>
-          </a:p>
-        </p:txBody>
-      </p:sp>
-      <p:sp>
-        <p:nvSpPr>
-          <p:cNvPr id="4" name="TextBox 3"/>
-          <p:cNvSpPr txBox="1"/>
-          <p:nvPr/>
-        </p:nvSpPr>
-        <p:spPr>
-          <a:xfrm>
-            <a:off x="1547616" y="357946"/>
-            <a:ext cx="6048768" cy="784830"/>
-          </a:xfrm>
-          <a:prstGeom prst="rect">
-            <a:avLst/>
-          </a:prstGeom>
-          <a:noFill/>
-        </p:spPr>
-        <p:txBody>
-          <a:bodyPr wrap="square" rtlCol="0">
-            <a:spAutoFit/>
-          </a:bodyPr>
-          <a:lstStyle/>
-          <a:p>
-            <a:r>
-              <a:rPr lang="bg-BG" sz="4500" dirty="0">
-                <a:solidFill>
-                  <a:schemeClr val="bg1"/>
-                </a:solidFill>
-              </a:rPr>
-              <a:t>Как работи проектът?</a:t>
-            </a:r>
-            <a:endParaRPr lang="en-US" sz="4500" dirty="0">
-              <a:solidFill>
-                <a:schemeClr val="bg1"/>
-              </a:solidFill>
-            </a:endParaRPr>
-          </a:p>
-        </p:txBody>
-      </p:sp>
-      <p:sp>
-        <p:nvSpPr>
-          <p:cNvPr id="5" name="TextBox 4"/>
-          <p:cNvSpPr txBox="1"/>
-          <p:nvPr/>
-        </p:nvSpPr>
-        <p:spPr>
-          <a:xfrm>
-            <a:off x="1384856" y="2078217"/>
-            <a:ext cx="6269182" cy="1631216"/>
-          </a:xfrm>
-          <a:prstGeom prst="rect">
-            <a:avLst/>
-          </a:prstGeom>
-          <a:noFill/>
-        </p:spPr>
-        <p:txBody>
-          <a:bodyPr wrap="square" rtlCol="0">
-            <a:spAutoFit/>
-          </a:bodyPr>
-          <a:lstStyle/>
-          <a:p>
-            <a:r>
-              <a:rPr lang="ru-RU" sz="2000" dirty="0">
-                <a:solidFill>
-                  <a:schemeClr val="bg1"/>
-                </a:solidFill>
-              </a:rPr>
-              <a:t>За производители: Качване на обяви с продукти, цени и локация.</a:t>
-            </a:r>
-          </a:p>
-          <a:p>
-            <a:endParaRPr lang="ru-RU" sz="2000" dirty="0">
-              <a:solidFill>
-                <a:schemeClr val="bg1"/>
-              </a:solidFill>
-            </a:endParaRPr>
-          </a:p>
-          <a:p>
-            <a:r>
-              <a:rPr lang="ru-RU" sz="2000" dirty="0">
-                <a:solidFill>
-                  <a:schemeClr val="bg1"/>
-                </a:solidFill>
-              </a:rPr>
-              <a:t>За потребители: Търсене с филтри за вид продукт, цена  и разстояние.</a:t>
-            </a:r>
-            <a:endParaRPr lang="en-US" sz="2000" dirty="0">
-              <a:solidFill>
-                <a:schemeClr val="bg1"/>
-              </a:solidFill>
-            </a:endParaRPr>
-          </a:p>
-        </p:txBody>
-      </p:sp>
-      <p:pic>
-        <p:nvPicPr>
-          <p:cNvPr id="13" name="Google Shape;136;p11" descr="preencoded.png"/>
-          <p:cNvPicPr preferRelativeResize="0"/>
-          <p:nvPr/>
-        </p:nvPicPr>
-        <p:blipFill rotWithShape="1">
-          <a:blip r:embed="rId5">
-            <a:alphaModFix/>
-          </a:blip>
-          <a:srcRect/>
-          <a:stretch/>
-        </p:blipFill>
-        <p:spPr>
-          <a:xfrm>
-            <a:off x="6910642" y="3709433"/>
-            <a:ext cx="2052637" cy="1343025"/>
-          </a:xfrm>
-          <a:prstGeom prst="rect">
-            <a:avLst/>
-          </a:prstGeom>
-          <a:noFill/>
-          <a:ln>
-            <a:noFill/>
-          </a:ln>
-        </p:spPr>
-      </p:pic>
-      <p:sp>
-        <p:nvSpPr>
-          <p:cNvPr id="6" name="Oval 5"/>
-          <p:cNvSpPr/>
-          <p:nvPr/>
-        </p:nvSpPr>
-        <p:spPr>
-          <a:xfrm>
-            <a:off x="-2109712" y="-586787"/>
-            <a:ext cx="3459125" cy="3459125"/>
-          </a:xfrm>
-          <a:prstGeom prst="ellipse">
-            <a:avLst/>
-          </a:prstGeom>
-          <a:solidFill>
-            <a:schemeClr val="accent6">
-              <a:alpha val="50000"/>
-            </a:schemeClr>
-          </a:solidFill>
-          <a:ln>
-            <a:noFill/>
-          </a:ln>
-        </p:spPr>
-        <p:style>
-          <a:lnRef idx="0">
-            <a:scrgbClr r="0" g="0" b="0"/>
-          </a:lnRef>
-          <a:fillRef idx="0">
-            <a:scrgbClr r="0" g="0" b="0"/>
-          </a:fillRef>
-          <a:effectRef idx="0">
-            <a:scrgbClr r="0" g="0" b="0"/>
-          </a:effectRef>
-          <a:fontRef idx="minor">
-            <a:schemeClr val="lt1"/>
-          </a:fontRef>
-        </p:style>
-        <p:txBody>
-          <a:bodyPr rtlCol="0" anchor="ctr"/>
-          <a:lstStyle/>
-          <a:p>
-            <a:pPr algn="ctr"/>
-            <a:endParaRPr lang="en-US" b="1">
-              <a:ln w="22225">
-                <a:solidFill>
-                  <a:schemeClr val="accent2"/>
-                </a:solidFill>
-                <a:prstDash val="solid"/>
-              </a:ln>
-              <a:solidFill>
-                <a:schemeClr val="accent2">
-                  <a:lumMod val="40000"/>
-                  <a:lumOff val="60000"/>
-                </a:schemeClr>
-              </a:solidFill>
-            </a:endParaRPr>
-          </a:p>
-        </p:txBody>
-      </p:sp>
-    </p:spTree>
-    <p:extLst>
-      <p:ext uri="{BB962C8B-B14F-4D97-AF65-F5344CB8AC3E}">
-        <p14:creationId xmlns:p14="http://schemas.microsoft.com/office/powerpoint/2010/main" val="3131441354"/>
-      </p:ext>
-    </p:extLst>
-  </p:cSld>
-  <p:clrMapOvr>
-    <a:masterClrMapping/>
-  </p:clrMapOvr>
-  <p:timing>
-    <p:tnLst>
-      <p:par>
-        <p:cTn id="1" dur="indefinite" restart="never" nodeType="tmRoot"/>
-      </p:par>
-    </p:tnLst>
-  </p:timing>
-</p:sld>
-</file>
-
-<file path=ppt/slides/slide13.xml><?xml version="1.0" encoding="utf-8"?>
-<p:sld xmlns:a="http://schemas.openxmlformats.org/drawingml/2006/main" xmlns:r="http://schemas.openxmlformats.org/officeDocument/2006/relationships" xmlns:p="http://schemas.openxmlformats.org/presentationml/2006/main">
-  <p:cSld>
-    <p:bg>
-      <p:bgPr>
-        <a:solidFill>
-          <a:srgbClr val="000000"/>
-        </a:solidFill>
-        <a:effectLst/>
-      </p:bgPr>
-    </p:bg>
-    <p:spTree>
-      <p:nvGrpSpPr>
         <p:cNvPr id="1" name="Shape 117"/>
         <p:cNvGrpSpPr/>
         <p:nvPr/>
@@ -6082,7 +5478,7 @@
 </p:sld>
 </file>
 
-<file path=ppt/slides/slide14.xml><?xml version="1.0" encoding="utf-8"?>
+<file path=ppt/slides/slide13.xml><?xml version="1.0" encoding="utf-8"?>
 <p:sld xmlns:a="http://schemas.openxmlformats.org/drawingml/2006/main" xmlns:r="http://schemas.openxmlformats.org/officeDocument/2006/relationships" xmlns:p="http://schemas.openxmlformats.org/presentationml/2006/main">
   <p:cSld>
     <p:bg>
@@ -7286,6 +6682,13 @@
   <p:clrMapOvr>
     <a:masterClrMapping/>
   </p:clrMapOvr>
+  <p:timing>
+    <p:tnLst>
+      <p:par>
+        <p:cTn id="1" dur="indefinite" restart="never" nodeType="tmRoot"/>
+      </p:par>
+    </p:tnLst>
+  </p:timing>
 </p:sld>
 </file>
 
@@ -7402,7 +6805,7 @@
         </p:blipFill>
         <p:spPr>
           <a:xfrm>
-            <a:off x="249705" y="-1"/>
+            <a:off x="-4762" y="-6"/>
             <a:ext cx="9144000" cy="5143500"/>
           </a:xfrm>
           <a:prstGeom prst="rect">
@@ -7456,7 +6859,7 @@
         </p:blipFill>
         <p:spPr>
           <a:xfrm>
-            <a:off x="239526" y="0"/>
+            <a:off x="0" y="-3"/>
             <a:ext cx="2338388" cy="5143500"/>
           </a:xfrm>
           <a:prstGeom prst="rect">
@@ -7585,6 +6988,33 @@
           </a:p>
         </p:txBody>
       </p:sp>
+      <p:pic>
+        <p:nvPicPr>
+          <p:cNvPr id="10" name="Google Shape;135;p11" descr="preencoded.png"/>
+          <p:cNvPicPr preferRelativeResize="0"/>
+          <p:nvPr/>
+        </p:nvPicPr>
+        <p:blipFill rotWithShape="1">
+          <a:blip r:embed="rId8">
+            <a:alphaModFix/>
+          </a:blip>
+          <a:srcRect/>
+          <a:stretch/>
+        </p:blipFill>
+        <p:spPr>
+          <a:xfrm>
+            <a:off x="-249705" y="205047"/>
+            <a:ext cx="2389139" cy="1940313"/>
+          </a:xfrm>
+          <a:prstGeom prst="rect">
+            <a:avLst/>
+          </a:prstGeom>
+          <a:noFill/>
+          <a:ln>
+            <a:noFill/>
+          </a:ln>
+        </p:spPr>
+      </p:pic>
     </p:spTree>
   </p:cSld>
   <p:clrMapOvr>
@@ -7602,6 +7032,13 @@
       </p:transition>
     </mc:Fallback>
   </mc:AlternateContent>
+  <p:timing>
+    <p:tnLst>
+      <p:par>
+        <p:cTn id="1" dur="indefinite" restart="never" nodeType="tmRoot"/>
+      </p:par>
+    </p:tnLst>
+  </p:timing>
 </p:sld>
 </file>
 
@@ -8209,6 +7646,13 @@
   <p:clrMapOvr>
     <a:masterClrMapping/>
   </p:clrMapOvr>
+  <p:timing>
+    <p:tnLst>
+      <p:par>
+        <p:cTn id="1" dur="indefinite" restart="never" nodeType="tmRoot"/>
+      </p:par>
+    </p:tnLst>
+  </p:timing>
 </p:sld>
 </file>
 
@@ -8498,8 +7942,8 @@
         </p:nvSpPr>
         <p:spPr>
           <a:xfrm>
-            <a:off x="1924493" y="1587162"/>
-            <a:ext cx="5295014" cy="2893100"/>
+            <a:off x="1974111" y="2055647"/>
+            <a:ext cx="4958316" cy="1569660"/>
           </a:xfrm>
           <a:prstGeom prst="rect">
             <a:avLst/>
@@ -8514,57 +7958,18 @@
           <a:p>
             <a:pPr algn="ctr"/>
             <a:r>
-              <a:rPr lang="ru-RU" sz="2400" b="1" dirty="0">
+              <a:rPr lang="ru-RU" sz="2400" dirty="0">
                 <a:solidFill>
                   <a:schemeClr val="bg1"/>
                 </a:solidFill>
               </a:rPr>
-              <a:t>За производители:</a:t>
-            </a:r>
-            <a:r>
-              <a:rPr lang="ru-RU" sz="2400" dirty="0">
-                <a:solidFill>
-                  <a:schemeClr val="bg1"/>
-                </a:solidFill>
-              </a:rPr>
-              <a:t> Личен профил с инвентар, цени и локация в реално време.</a:t>
+              <a:t>Качване на обяви с цени, продукти и локации, както и търсене с филтри за вид продукт, цена и локация</a:t>
             </a:r>
             <a:endParaRPr lang="en-US" sz="2400" dirty="0">
               <a:solidFill>
                 <a:schemeClr val="bg1"/>
               </a:solidFill>
             </a:endParaRPr>
-          </a:p>
-          <a:p>
-            <a:pPr algn="ctr"/>
-            <a:endParaRPr lang="ru-RU" sz="2400" dirty="0">
-              <a:solidFill>
-                <a:schemeClr val="bg1"/>
-              </a:solidFill>
-            </a:endParaRPr>
-          </a:p>
-          <a:p>
-            <a:pPr algn="ctr"/>
-            <a:r>
-              <a:rPr lang="ru-RU" sz="2400" b="1" dirty="0">
-                <a:solidFill>
-                  <a:schemeClr val="bg1"/>
-                </a:solidFill>
-              </a:rPr>
-              <a:t>За потребители:</a:t>
-            </a:r>
-            <a:r>
-              <a:rPr lang="ru-RU" sz="2400" dirty="0">
-                <a:solidFill>
-                  <a:schemeClr val="bg1"/>
-                </a:solidFill>
-              </a:rPr>
-              <a:t> Интуитивно търсене с филтри по цена, рейтинг и разстояние.</a:t>
-            </a:r>
-          </a:p>
-          <a:p>
-            <a:pPr algn="ctr"/>
-            <a:endParaRPr lang="en-US" dirty="0"/>
           </a:p>
         </p:txBody>
       </p:sp>
